--- a/powerpoint/Presentasjon_Kommunedirektoren_Konsernstyring_2026.pptx
+++ b/powerpoint/Presentasjon_Kommunedirektoren_Konsernstyring_2026.pptx
@@ -3214,7 +3214,7 @@
               </a:defRPr>
             </a:pPr>
             <a:r>
-              <a:t>Dato: 14.10.2026  •  Camilla Dunsæd, Kommunedirektør  /  Frank Ellingsen, Senior Controller</a:t>
+              <a:t>Dato: 17.10.2026  •  Camilla Dunsæd, Kommunedirektør  /  Frank Ellingsen, Senior Controller</a:t>
             </a:r>
           </a:p>
           <a:p>
@@ -3229,7 +3229,7 @@
               </a:defRPr>
             </a:pPr>
             <a:r>
-              <a:t>Audit Stempel (SHA-256): bf580cecde746f9d3514dc1c...  |  Stage-Gate Port 9 Attestert</a:t>
+              <a:t>Audit Stempel (SHA-256): d5393885dee7c2f36ba805db...  |  Stage-Gate Port 9 Attestert</a:t>
             </a:r>
           </a:p>
         </p:txBody>
@@ -3746,7 +3746,7 @@
               </a:defRPr>
             </a:pPr>
             <a:r>
-              <a:t>Kristiansand kommune | Økonomi &amp; Virksomhetsstyring  •  Audit ID: bf580cecde74  •  Side 2 av 7</a:t>
+              <a:t>Kristiansand kommune | Økonomi &amp; Virksomhetsstyring  •  Audit ID: d5393885dee7  •  Side 2 av 7</a:t>
             </a:r>
           </a:p>
         </p:txBody>
@@ -4034,7 +4034,7 @@
                         </a:defRPr>
                       </a:pPr>
                       <a:r>
-                        <a:t>+1 420 000 kr</a:t>
+                        <a:t>-1 420 000 kr</a:t>
                       </a:r>
                     </a:p>
                   </a:txBody>
@@ -4057,7 +4057,7 @@
                         </a:defRPr>
                       </a:pPr>
                       <a:r>
-                        <a:t>+0,17 %</a:t>
+                        <a:t>-0,17 %</a:t>
                       </a:r>
                     </a:p>
                   </a:txBody>
@@ -4139,7 +4139,7 @@
                         </a:defRPr>
                       </a:pPr>
                       <a:r>
-                        <a:t>+1 069 000 kr</a:t>
+                        <a:t>-1 069 000 kr</a:t>
                       </a:r>
                     </a:p>
                   </a:txBody>
@@ -4162,7 +4162,7 @@
                         </a:defRPr>
                       </a:pPr>
                       <a:r>
-                        <a:t>+0,12 %</a:t>
+                        <a:t>-0,12 %</a:t>
                       </a:r>
                     </a:p>
                   </a:txBody>
@@ -4244,7 +4244,7 @@
                         </a:defRPr>
                       </a:pPr>
                       <a:r>
-                        <a:t>-200 000 kr</a:t>
+                        <a:t>+200 000 kr</a:t>
                       </a:r>
                     </a:p>
                   </a:txBody>
@@ -4267,7 +4267,7 @@
                         </a:defRPr>
                       </a:pPr>
                       <a:r>
-                        <a:t>-0,06 %</a:t>
+                        <a:t>+0,06 %</a:t>
                       </a:r>
                     </a:p>
                   </a:txBody>
@@ -4349,7 +4349,7 @@
                         </a:defRPr>
                       </a:pPr>
                       <a:r>
-                        <a:t>+100 000 kr</a:t>
+                        <a:t>-100 000 kr</a:t>
                       </a:r>
                     </a:p>
                   </a:txBody>
@@ -4372,7 +4372,7 @@
                         </a:defRPr>
                       </a:pPr>
                       <a:r>
-                        <a:t>+0,06 %</a:t>
+                        <a:t>-0,06 %</a:t>
                       </a:r>
                     </a:p>
                   </a:txBody>
@@ -4454,7 +4454,7 @@
                         </a:defRPr>
                       </a:pPr>
                       <a:r>
-                        <a:t>+100 000 kr</a:t>
+                        <a:t>-100 000 kr</a:t>
                       </a:r>
                     </a:p>
                   </a:txBody>
@@ -4477,7 +4477,7 @@
                         </a:defRPr>
                       </a:pPr>
                       <a:r>
-                        <a:t>+0,07 %</a:t>
+                        <a:t>-0,07 %</a:t>
                       </a:r>
                     </a:p>
                   </a:txBody>
@@ -4559,7 +4559,7 @@
                         </a:defRPr>
                       </a:pPr>
                       <a:r>
-                        <a:t>+2 489 000 kr</a:t>
+                        <a:t>-2 489 000 kr</a:t>
                       </a:r>
                     </a:p>
                   </a:txBody>
@@ -4582,7 +4582,7 @@
                         </a:defRPr>
                       </a:pPr>
                       <a:r>
-                        <a:t>+0,10 %</a:t>
+                        <a:t>-0,10 %</a:t>
                       </a:r>
                     </a:p>
                   </a:txBody>
@@ -4628,7 +4628,7 @@
               </a:defRPr>
             </a:pPr>
             <a:r>
-              <a:t>Kristiansand kommune | Økonomi &amp; Virksomhetsstyring  •  Audit ID: bf580cecde74  •  Side 3 av 7</a:t>
+              <a:t>Kristiansand kommune | Økonomi &amp; Virksomhetsstyring  •  Audit ID: d5393885dee7  •  Side 3 av 7</a:t>
             </a:r>
           </a:p>
         </p:txBody>
@@ -5174,7 +5174,7 @@
               </a:defRPr>
             </a:pPr>
             <a:r>
-              <a:t>Kristiansand kommune | Økonomi &amp; Virksomhetsstyring  •  Audit ID: bf580cecde74  •  Side 4 av 7</a:t>
+              <a:t>Kristiansand kommune | Økonomi &amp; Virksomhetsstyring  •  Audit ID: d5393885dee7  •  Side 4 av 7</a:t>
             </a:r>
           </a:p>
         </p:txBody>
@@ -5691,7 +5691,7 @@
               </a:defRPr>
             </a:pPr>
             <a:r>
-              <a:t>Kristiansand kommune | Økonomi &amp; Virksomhetsstyring  •  Audit ID: bf580cecde74  •  Side 5 av 7</a:t>
+              <a:t>Kristiansand kommune | Økonomi &amp; Virksomhetsstyring  •  Audit ID: d5393885dee7  •  Side 5 av 7</a:t>
             </a:r>
           </a:p>
         </p:txBody>
@@ -6082,7 +6082,7 @@
               </a:defRPr>
             </a:pPr>
             <a:r>
-              <a:t>Kristiansand kommune | Økonomi &amp; Virksomhetsstyring  •  Audit ID: bf580cecde74  •  Side 6 av 7</a:t>
+              <a:t>Kristiansand kommune | Økonomi &amp; Virksomhetsstyring  •  Audit ID: d5393885dee7  •  Side 6 av 7</a:t>
             </a:r>
           </a:p>
         </p:txBody>
@@ -6281,7 +6281,7 @@
               </a:defRPr>
             </a:pPr>
             <a:r>
-              <a:t>Kristiansand, 14.10.2026  •  Camilla Dunsæd, Kommunedirektør  /  Frank Ellingsen, Senior Controller</a:t>
+              <a:t>Kristiansand, 17.10.2026  •  Camilla Dunsæd, Kommunedirektør  /  Frank Ellingsen, Senior Controller</a:t>
             </a:r>
           </a:p>
         </p:txBody>
@@ -6317,7 +6317,7 @@
               </a:defRPr>
             </a:pPr>
             <a:r>
-              <a:t>Kristiansand kommune | Økonomi &amp; Virksomhetsstyring  •  Audit ID: bf580cecde74  •  Side 7 av 7</a:t>
+              <a:t>Kristiansand kommune | Økonomi &amp; Virksomhetsstyring  •  Audit ID: d5393885dee7  •  Side 7 av 7</a:t>
             </a:r>
           </a:p>
         </p:txBody>
